--- a/OnCue 复赛说明.pptx
+++ b/OnCue 复赛说明.pptx
@@ -694,7 +694,7 @@
           <a:p>
             <a:r>
               <a:rPr lang="en-US" dirty="0"/>
-              <a:t>方案有没有用，要看真实运行。在真实 Rinx、真实模型的一次运行里，三道把关都起了作用。问题一：模型写出了来源和台词里都没有的「4 人」，被数字核对规则拒绝，没有进草稿，再试一次通过后推荐句才进草稿框。问题二：发送前又读了一次群，两步确认后发出 1 条，读回时在群里看到了这条，才显示已发到。问题三：看反响时群里还没有人回复，OnCue 如实说没有，不调用助手去编。</a:t>
+              <a:t>方案有没有用，要看真实运行。在官方 Rinx 1.3.0、真实模型的一次完整运行里，三道把关都起了作用。问题一：三种说法里，A 写了来源里没有的「4个人」，B 写了没人答应过的「已经参与订」，两条都被拦下并写明原因，推荐的 B 不合格，就改用通过核对的 C 放进草稿。问题二：确认发送前群里来了一条新消息，确认视图把它标了出来，看过之后才发；每次发出都读回，在群里看到这条才显示已发到。问题三：第二账号真实回复后，看反响把原话照列，助手对照试映时的预想给出下一句；这段对照也要过检查，第一次没通过被丢弃，再点一次才通过。</a:t>
             </a:r>
             <a:endParaRPr lang="en-US" dirty="0"/>
           </a:p>
@@ -782,7 +782,7 @@
           <a:p>
             <a:r>
               <a:rPr lang="en-US" dirty="0"/>
-              <a:t>一次真实运行不够，所以每改一次代码都全部重跑。界面场景 62 个、67 次运行，覆盖两种窗口尺寸，宿主的每一种回复和错误都由场景注入。逻辑测试 12 套、400 多项断言，在真实的 card-host 虚拟机里直接跑生产函数。真机上，四种授权状态在官方 Rinx 上实拍，完整闭环在官方 Rinx c515e5fc、零本地补丁的环境里复验。为适配最新运行时，我们还按单次回调的指令上限，把消息窗口比对改成了线性复杂度。</a:t>
+              <a:t>一次真实运行不够，所以每改一次代码都全部重跑。界面场景 75 个、85 次运行，覆盖三种窗口尺寸，宿主的每一种回复和错误都由场景注入。逻辑测试 12 套、437 项断言，在真实的 card-host 虚拟机里直接跑生产函数。真机上，四种授权状态在官方 Rinx 上实拍；完整闭环在官方 Rinx 1.3.0 发布包上跑通，包括确认前群里来新消息的情况。为适配最新运行时，我们按单次回调 20 万条指令的上限，把核对拆进计时器回调分步执行，并把等待助手的期限放宽到 150 秒。</a:t>
             </a:r>
             <a:endParaRPr lang="en-US" dirty="0"/>
           </a:p>
@@ -1222,7 +1222,7 @@
           <a:p>
             <a:r>
               <a:rPr lang="en-US" dirty="0"/>
-              <a:t>最后用一页收回。问题：AI 直接替人说话会编造、会越权、发完就断。方案：把发言当成试映，分读群、试映、上映、反响四个阶段，加三道把关，助手写措辞，程序核对事实，人做决定。验证：真实模型上三道把关都起了作用，67 次界面场景运行和 12 套逻辑测试全部通过。贡献：测试技能 PR #192，任何 Splash 应用都能用；以及 Rinx、Palpo 两份宿主问题复现。下一步是在最新 Rinx 1.3.0 上复验、打 tag 发布、更新 App Hub 提交。还没验证的是第二个真人账号的现场演示、其他平台和商店安装。谢谢。</a:t>
+              <a:t>最后用一页收回。问题：AI 直接替人说话会编造、会越权、发完就断。方案：把发言当成试映，分读群、试映、上映、反响四个阶段，加三道把关，助手写措辞，程序核对事实，人做决定。验证：在官方 Rinx 1.3.0 真机上跑通了完整闭环，85 次界面场景运行和 12 套 437 项逻辑测试全部通过。贡献：测试技能 PR #192，任何 Splash 应用都能用；以及 Rinx、Palpo 两份宿主问题复现。下一步是合并 0.5.3、打 tag 发布、更新 App Hub 提交。还没验证的是两个真人在不同设备上的现场对话（这次第二账号的回复由脚本发出），以及其他平台和商店安装。谢谢。</a:t>
             </a:r>
             <a:endParaRPr lang="en-US" dirty="0"/>
           </a:p>
@@ -1926,7 +1926,7 @@
           <a:p>
             <a:r>
               <a:rPr lang="en-US" dirty="0"/>
-              <a:t>这是一次真实运行里的完整闭环，四张都是真机截图。Agent 自动完成的部分：打开就读群；一次点击完成允许和试映，并在核对群里没有新消息后，把推荐句放进草稿框；发送后自动读回，确认群里真的有这条；看反响时自动重读群聊，没有人回复就如实说。人只做三次决定：允许发给助手、应用修订、确认发送。当天下午，我们又在官方 Rinx c515e5fc、零本地补丁的环境里复验了同一闭环。</a:t>
+              <a:t>这是官方 Rinx 1.3.0 发布包上的一次完整运行，四张都是真机截图。Agent 自动完成的部分：打开就读群；一次点击完成允许和试映，三种说法逐条核对，不合格的只拦它自己并写明原因，推荐句不合格就改用通过核对的那条，放进草稿框；发送前再读一次群，发出后读回，确认群里真的有这条；看反响时把第二账号的回复按原话列出，再请助手对照试映时的预想，给出下一句。人只做三次决定：允许发给助手、应用修订、确认发送。</a:t>
             </a:r>
             <a:endParaRPr lang="en-US" dirty="0"/>
           </a:p>
@@ -3674,7 +3674,7 @@
                 <a:ea typeface="Noto Sans SC" pitchFamily="34" charset="-122"/>
                 <a:cs typeface="Noto Sans SC" pitchFamily="34" charset="-120"/>
               </a:rPr>
-              <a:t>「4 人」被拒</a:t>
+              <a:t>两条说法被拦下</a:t>
             </a:r>
             <a:endParaRPr lang="en-US" sz="2000" dirty="0"/>
           </a:p>
@@ -3718,7 +3718,7 @@
                 <a:ea typeface="Noto Sans SC" pitchFamily="34" charset="-122"/>
                 <a:cs typeface="Noto Sans SC" pitchFamily="34" charset="-120"/>
               </a:rPr>
-              <a:t>模型写出了来源和台词里都没有的「4 人」，被数字核对规则拒绝，没有进草稿；再试一次通过后，推荐句才进草稿框。</a:t>
+              <a:t>A 写了来源里没有的「4个人」，B 写了没人答应过的「已经参与订」。只拦这两条并写明原因，推荐改用通过核对的 C。</a:t>
             </a:r>
             <a:endParaRPr lang="en-US" sz="1400" dirty="0"/>
           </a:p>
@@ -3876,7 +3876,7 @@
                 <a:ea typeface="Noto Sans SC" pitchFamily="34" charset="-122"/>
                 <a:cs typeface="Noto Sans SC" pitchFamily="34" charset="-120"/>
               </a:rPr>
-              <a:t>两步确认才发出</a:t>
+              <a:t>新消息先标出来</a:t>
             </a:r>
             <a:endParaRPr lang="en-US" sz="2000" dirty="0"/>
           </a:p>
@@ -3891,7 +3891,7 @@
         <p:spPr>
           <a:xfrm>
             <a:off x="4682067" y="3025049"/>
-            <a:ext cx="2912703" cy="878681"/>
+            <a:ext cx="2912703" cy="1163108"/>
           </a:xfrm>
           <a:prstGeom prst="rect">
             <a:avLst/>
@@ -3920,7 +3920,7 @@
                 <a:ea typeface="Noto Sans SC" pitchFamily="34" charset="-122"/>
                 <a:cs typeface="Noto Sans SC" pitchFamily="34" charset="-120"/>
               </a:rPr>
-              <a:t>发送前又读了一次群；发出 1 条后读回，在群里看到这条，才显示「已发到」。</a:t>
+              <a:t>确认前群里来了新消息，确认视图把它标出，看过后才发；每次发出都读回，在群里看到这条才显示「已发到」。</a:t>
             </a:r>
             <a:endParaRPr lang="en-US" sz="1400" dirty="0"/>
           </a:p>
@@ -4049,7 +4049,7 @@
         <p:spPr>
           <a:xfrm>
             <a:off x="8271934" y="2567849"/>
-            <a:ext cx="2912703" cy="355600"/>
+            <a:ext cx="3107267" cy="355600"/>
           </a:xfrm>
           <a:prstGeom prst="rect">
             <a:avLst/>
@@ -4078,7 +4078,7 @@
                 <a:ea typeface="Noto Sans SC" pitchFamily="34" charset="-122"/>
                 <a:cs typeface="Noto Sans SC" pitchFamily="34" charset="-120"/>
               </a:rPr>
-              <a:t>没有回复，就不猜</a:t>
+              <a:t>真实回复，对照出下一句</a:t>
             </a:r>
             <a:endParaRPr lang="en-US" sz="2000" dirty="0"/>
           </a:p>
@@ -4093,7 +4093,7 @@
         <p:spPr>
           <a:xfrm>
             <a:off x="8271934" y="3025049"/>
-            <a:ext cx="2912703" cy="878681"/>
+            <a:ext cx="2912703" cy="1163108"/>
           </a:xfrm>
           <a:prstGeom prst="rect">
             <a:avLst/>
@@ -4122,7 +4122,7 @@
                 <a:ea typeface="Noto Sans SC" pitchFamily="34" charset="-122"/>
                 <a:cs typeface="Noto Sans SC" pitchFamily="34" charset="-120"/>
               </a:rPr>
-              <a:t>看反响重读群聊后，如实显示「发出以后还没有新回复」，没有调用助手去编反应。</a:t>
+              <a:t>第二账号回复后，原话照列，助手对照预想给出下一句。对照也要过检查：第一次没过被丢弃，再点一次才通过。</a:t>
             </a:r>
             <a:endParaRPr lang="en-US" sz="1400" dirty="0"/>
           </a:p>
@@ -4137,7 +4137,7 @@
         <p:spPr>
           <a:xfrm>
             <a:off x="812800" y="6238280"/>
-            <a:ext cx="3844052" cy="238720"/>
+            <a:ext cx="5213350" cy="238720"/>
           </a:xfrm>
           <a:prstGeom prst="rect">
             <a:avLst/>
@@ -4166,7 +4166,7 @@
                 <a:ea typeface="Noto Sans SC" pitchFamily="34" charset="-122"/>
                 <a:cs typeface="Noto Sans SC" pitchFamily="34" charset="-120"/>
               </a:rPr>
-              <a:t>真实运行记录 evidence/native-053/results.md</a:t>
+              <a:t>真机记录 evidence/native-130（官方 Rinx 1.3.0，2026-10-13）</a:t>
             </a:r>
             <a:endParaRPr lang="en-US" sz="1200" dirty="0"/>
           </a:p>
@@ -4403,7 +4403,7 @@
                 <a:ea typeface="Noto Serif SC" pitchFamily="18" charset="-122"/>
                 <a:cs typeface="Noto Serif SC" pitchFamily="18" charset="-120"/>
               </a:rPr>
-              <a:t>67/67</a:t>
+              <a:t>85/85</a:t>
             </a:r>
             <a:endParaRPr lang="en-US" sz="4400" dirty="0"/>
           </a:p>
@@ -4491,7 +4491,7 @@
                 <a:ea typeface="Noto Sans SC" pitchFamily="34" charset="-122"/>
                 <a:cs typeface="Noto Sans SC" pitchFamily="34" charset="-120"/>
               </a:rPr>
-              <a:t>62 个场景，412×892 与 954×448 两种尺寸，宿主回复由场景注入</a:t>
+              <a:t>75 个场景，412×892、954×448、1000×800 三种尺寸，宿主回复由场景注入</a:t>
             </a:r>
             <a:endParaRPr lang="en-US" sz="1200" dirty="0"/>
           </a:p>
@@ -4650,7 +4650,7 @@
                 <a:ea typeface="Noto Sans SC" pitchFamily="34" charset="-122"/>
                 <a:cs typeface="Noto Sans SC" pitchFamily="34" charset="-120"/>
               </a:rPr>
-              <a:t>400 多项断言，在真实 card-host 虚拟机里直接跑生产函数</a:t>
+              <a:t>437 项断言，在真实 card-host 虚拟机里直接跑生产函数</a:t>
             </a:r>
             <a:endParaRPr lang="en-US" sz="1200" dirty="0"/>
           </a:p>
@@ -4880,7 +4880,7 @@
                 <a:ea typeface="Noto Serif SC" pitchFamily="18" charset="-122"/>
                 <a:cs typeface="Noto Serif SC" pitchFamily="18" charset="-120"/>
               </a:rPr>
-              <a:t>0 补丁</a:t>
+              <a:t>1.3.0</a:t>
             </a:r>
             <a:endParaRPr lang="en-US" sz="4400" dirty="0"/>
           </a:p>
@@ -4924,7 +4924,7 @@
                 <a:ea typeface="Noto Sans SC" pitchFamily="34" charset="-122"/>
                 <a:cs typeface="Noto Sans SC" pitchFamily="34" charset="-120"/>
               </a:rPr>
-              <a:t>官方 Rinx 复验</a:t>
+              <a:t>官方 Rinx 真机闭环</a:t>
             </a:r>
             <a:endParaRPr lang="en-US" sz="1500" dirty="0"/>
           </a:p>
@@ -4939,7 +4939,7 @@
         <p:spPr>
           <a:xfrm>
             <a:off x="9059334" y="3133396"/>
-            <a:ext cx="2175806" cy="482600"/>
+            <a:ext cx="2175806" cy="711200"/>
           </a:xfrm>
           <a:prstGeom prst="rect">
             <a:avLst/>
@@ -4968,7 +4968,7 @@
                 <a:ea typeface="Noto Sans SC" pitchFamily="34" charset="-122"/>
                 <a:cs typeface="Noto Sans SC" pitchFamily="34" charset="-120"/>
               </a:rPr>
-              <a:t>在 Rinx c515e5fc 上跑通从读群到反响的完整闭环</a:t>
+              <a:t>官方发布包上跑通读群、试映、确认发送、读回、看反响，以及确认前来新消息</a:t>
             </a:r>
             <a:endParaRPr lang="en-US" sz="1200" dirty="0"/>
           </a:p>
@@ -5012,7 +5012,7 @@
                 <a:ea typeface="Noto Sans SC" pitchFamily="34" charset="-122"/>
                 <a:cs typeface="Noto Sans SC" pitchFamily="34" charset="-120"/>
               </a:rPr>
-              <a:t>适配最新 OctoSense：</a:t>
+              <a:t>适配最新运行时：</a:t>
             </a:r>
             <a:r>
               <a:rPr lang="en-US" sz="1500" dirty="0">
@@ -5023,7 +5023,7 @@
                 <a:ea typeface="Noto Sans SC" pitchFamily="34" charset="-122"/>
                 <a:cs typeface="Noto Sans SC" pitchFamily="34" charset="-120"/>
               </a:rPr>
-              <a:t>测试用的 card-host 从 App Hub main 构建；按当前运行时单次回调的指令上限，把消息窗口比对从 O(n×m) 改成 O(n+m)。</a:t>
+              <a:t>Rinx 1.3.0 对单次回调限 20 万条指令，我们把核对拆进计时器回调分步执行，消息窗口比对改成 O(n+m)；等待助手的期限放宽到 150 秒。</a:t>
             </a:r>
             <a:endParaRPr lang="en-US" sz="1500" dirty="0"/>
           </a:p>
@@ -8347,7 +8347,7 @@
                 <a:ea typeface="Noto Sans SC" pitchFamily="34" charset="-122"/>
                 <a:cs typeface="Noto Sans SC" pitchFamily="34" charset="-120"/>
               </a:rPr>
-              <a:t>真实模型上三道把关都起了作用；67 次界面场景运行、12 套逻辑测试全部通过</a:t>
+              <a:t>官方 Rinx 1.3.0 真机跑通完整闭环；85 次界面场景运行、12 套 437 项逻辑测试全部通过</a:t>
             </a:r>
             <a:endParaRPr lang="en-US" sz="1500" dirty="0"/>
           </a:p>
@@ -8592,7 +8592,7 @@
                 <a:ea typeface="Noto Sans SC" pitchFamily="34" charset="-122"/>
                 <a:cs typeface="Noto Sans SC" pitchFamily="34" charset="-120"/>
               </a:rPr>
-              <a:t>在最新 Rinx 1.3.0 上复验，打 tag 走 GitHub 发布</a:t>
+              <a:t>合并 0.5.3，打 tag 走 GitHub 发布</a:t>
             </a:r>
             <a:endParaRPr lang="en-US" sz="1300" dirty="0"/>
           </a:p>
@@ -8724,7 +8724,7 @@
                 <a:ea typeface="Noto Sans SC" pitchFamily="34" charset="-122"/>
                 <a:cs typeface="Noto Sans SC" pitchFamily="34" charset="-120"/>
               </a:rPr>
-              <a:t>第二个真人账号实时回复的现场演示</a:t>
+              <a:t>两个真人在不同设备上的现场对话</a:t>
             </a:r>
             <a:endParaRPr lang="en-US" sz="1300" dirty="0"/>
           </a:p>
@@ -8760,7 +8760,7 @@
         <p:spPr>
           <a:xfrm>
             <a:off x="812800" y="6238280"/>
-            <a:ext cx="5105638" cy="238720"/>
+            <a:ext cx="7529672" cy="238720"/>
           </a:xfrm>
           <a:prstGeom prst="rect">
             <a:avLst/>
@@ -8789,7 +8789,7 @@
                 <a:ea typeface="Noto Sans SC" pitchFamily="34" charset="-122"/>
                 <a:cs typeface="Noto Sans SC" pitchFamily="34" charset="-120"/>
               </a:rPr>
-              <a:t>源码 github.com/codezzzsleep/OnCue · 演示录屏 [链接待补]</a:t>
+              <a:t>源码 github.com/codezzzsleep/OnCue · 演示录屏 evidence/demo/oncue-demo-053.mp4</a:t>
             </a:r>
             <a:endParaRPr lang="en-US" sz="1200" dirty="0"/>
           </a:p>
@@ -14325,7 +14325,7 @@
       </p:sp>
       <p:pic>
         <p:nvPicPr>
-          <p:cNvPr id="5" name="Image 0" descr="真实 Rinx 中的 OnCue：打开后自动载入群聊，状态为「原消息已载入，共 12 条」">    </p:cNvPr>
+          <p:cNvPr id="5" name="Image 0" descr="官方 Rinx 1.3.0 中的 OnCue：打开后自动载入群聊，状态为「原消息已载入，共 12 条」">    </p:cNvPr>
           <p:cNvPicPr>
             <a:picLocks noChangeAspect="1"/>
           </p:cNvPicPr>
@@ -14333,7 +14333,7 @@
         </p:nvPicPr>
         <p:blipFill>
           <a:blip r:embed="rId1"/>
-          <a:srcRect l="0" r="0" t="21541" b="26327"/>
+          <a:srcRect l="0" r="0" t="171" b="171"/>
           <a:stretch/>
         </p:blipFill>
         <p:spPr>
@@ -14455,7 +14455,7 @@
                 <a:ea typeface="Noto Sans SC" pitchFamily="34" charset="-122"/>
                 <a:cs typeface="Noto Sans SC" pitchFamily="34" charset="-120"/>
               </a:rPr>
-              <a:t>② 试映 · 一键试映，推荐句自动进草稿</a:t>
+              <a:t>② 试映 · 逐条核对，推荐句进草稿</a:t>
             </a:r>
             <a:endParaRPr lang="en-US" sz="1500" dirty="0"/>
           </a:p>
@@ -14463,7 +14463,7 @@
       </p:sp>
       <p:pic>
         <p:nvPicPr>
-          <p:cNvPr id="9" name="Image 1" descr="真实 Rinx 中的 OnCue：三种说法完成，推荐 C 并自动放进草稿框">    </p:cNvPr>
+          <p:cNvPr id="9" name="Image 1" descr="官方 Rinx 1.3.0 中的 OnCue：B 这条没通过核对并写明原因，C 通过核对并被推荐">    </p:cNvPr>
           <p:cNvPicPr>
             <a:picLocks noChangeAspect="1"/>
           </p:cNvPicPr>
@@ -14471,7 +14471,7 @@
         </p:nvPicPr>
         <p:blipFill>
           <a:blip r:embed="rId2"/>
-          <a:srcRect l="0" r="0" t="21541" b="26327"/>
+          <a:srcRect l="0" r="0" t="171" b="171"/>
           <a:stretch/>
         </p:blipFill>
         <p:spPr>
@@ -14549,7 +14549,7 @@
                 <a:ea typeface="Noto Sans SC" pitchFamily="34" charset="-122"/>
                 <a:cs typeface="Noto Sans SC" pitchFamily="34" charset="-120"/>
               </a:rPr>
-              <a:t>「三种说法好了。推荐 C ……；已放进草稿框。」</a:t>
+              <a:t>「推荐的 B 没通过核对，已改用 C」</a:t>
             </a:r>
             <a:endParaRPr lang="en-US" sz="1300" dirty="0"/>
           </a:p>
@@ -14601,7 +14601,7 @@
       </p:sp>
       <p:pic>
         <p:nvPicPr>
-          <p:cNvPr id="13" name="Image 2" descr="真实 Rinx 中的 OnCue：已发到测试房，读回时看到了这条">    </p:cNvPr>
+          <p:cNvPr id="13" name="Image 2" descr="官方 Rinx 1.3.0 中的 OnCue：确认视图列出将发到的群和完整发送正文">    </p:cNvPr>
           <p:cNvPicPr>
             <a:picLocks noChangeAspect="1"/>
           </p:cNvPicPr>
@@ -14609,7 +14609,7 @@
         </p:nvPicPr>
         <p:blipFill>
           <a:blip r:embed="rId3"/>
-          <a:srcRect l="0" r="0" t="21541" b="26327"/>
+          <a:srcRect l="0" r="0" t="171" b="171"/>
           <a:stretch/>
         </p:blipFill>
         <p:spPr>
@@ -14687,7 +14687,7 @@
                 <a:ea typeface="Noto Sans SC" pitchFamily="34" charset="-122"/>
                 <a:cs typeface="Noto Sans SC" pitchFamily="34" charset="-120"/>
               </a:rPr>
-              <a:t>「已发到 OnCue 试映室测试房。刚才读回时看到了这条。」</a:t>
+              <a:t>读回时看到这条，才显示「已发到」</a:t>
             </a:r>
             <a:endParaRPr lang="en-US" sz="1300" dirty="0"/>
           </a:p>
@@ -14731,7 +14731,7 @@
                 <a:ea typeface="Noto Sans SC" pitchFamily="34" charset="-122"/>
                 <a:cs typeface="Noto Sans SC" pitchFamily="34" charset="-120"/>
               </a:rPr>
-              <a:t>④ 反响 · 自动重读群聊，不猜</a:t>
+              <a:t>④ 反响 · 原话照列，对照出下一句</a:t>
             </a:r>
             <a:endParaRPr lang="en-US" sz="1500" dirty="0"/>
           </a:p>
@@ -14739,7 +14739,7 @@
       </p:sp>
       <p:pic>
         <p:nvPicPr>
-          <p:cNvPr id="17" name="Image 3" descr="真实 Rinx 中的 OnCue：看反响显示发出以后还没有新回复，阶段条四段全部打勾">    </p:cNvPr>
+          <p:cNvPr id="17" name="Image 3" descr="官方 Rinx 1.3.0 中的 OnCue：第二账号的回复按原话列出，下面是对照和下一句">    </p:cNvPr>
           <p:cNvPicPr>
             <a:picLocks noChangeAspect="1"/>
           </p:cNvPicPr>
@@ -14747,7 +14747,7 @@
         </p:nvPicPr>
         <p:blipFill>
           <a:blip r:embed="rId4"/>
-          <a:srcRect l="0" r="0" t="21541" b="26327"/>
+          <a:srcRect l="0" r="0" t="171" b="171"/>
           <a:stretch/>
         </p:blipFill>
         <p:spPr>
@@ -14825,7 +14825,7 @@
                 <a:ea typeface="Noto Sans SC" pitchFamily="34" charset="-122"/>
                 <a:cs typeface="Noto Sans SC" pitchFamily="34" charset="-120"/>
               </a:rPr>
-              <a:t>「发出以后还没有新回复。」阶段条四段全部打勾</a:t>
+              <a:t>真实回复按原话列出，对照预想给出下一句</a:t>
             </a:r>
             <a:endParaRPr lang="en-US" sz="1300" dirty="0"/>
           </a:p>
@@ -14840,7 +14840,7 @@
         <p:spPr>
           <a:xfrm>
             <a:off x="812800" y="6238280"/>
-            <a:ext cx="6191885" cy="238720"/>
+            <a:ext cx="7639209" cy="238720"/>
           </a:xfrm>
           <a:prstGeom prst="rect">
             <a:avLst/>
@@ -14869,7 +14869,7 @@
                 <a:ea typeface="Noto Sans SC" pitchFamily="34" charset="-122"/>
                 <a:cs typeface="Noto Sans SC" pitchFamily="34" charset="-120"/>
               </a:rPr>
-              <a:t>真实 Rinx + 真实模型（MiniMax），2026-10-11 · 证据 evidence/native-053</a:t>
+              <a:t>官方 Rinx 1.3.0 发布包 + MiniMax-M2.7-highspeed，2026-10-13 · 证据 evidence/native-130</a:t>
             </a:r>
             <a:endParaRPr lang="en-US" sz="1200" dirty="0"/>
           </a:p>
